--- a/PRJ_2026/발표자료/AI기반 글로벌 공급망 컨트롤타워_GlobalFont.pptx
+++ b/PRJ_2026/발표자료/AI기반 글로벌 공급망 컨트롤타워_GlobalFont.pptx
@@ -9146,7 +9146,7 @@
         </p:nvSpPr>
         <p:spPr>
           <a:xfrm>
-            <a:off x="1303020" y="2951928"/>
+            <a:off x="1303020" y="3211239"/>
             <a:ext cx="1689890" cy="998220"/>
           </a:xfrm>
           <a:prstGeom prst="rect">
@@ -9191,7 +9191,7 @@
         <p:spPr>
           <a:xfrm>
             <a:off x="2915483" y="3424368"/>
-            <a:ext cx="464225" cy="502920"/>
+            <a:ext cx="783060" cy="502920"/>
           </a:xfrm>
           <a:prstGeom prst="rect">
             <a:avLst/>
@@ -9217,7 +9217,7 @@
                 <a:ea typeface="Arial" pitchFamily="34" charset="-122"/>
                 <a:cs typeface="Arial" pitchFamily="34" charset="-120"/>
               </a:rPr>
-              <a:t>/월</a:t>
+              <a:t>/ 월</a:t>
             </a:r>
             <a:endParaRPr lang="en-US" sz="2550" dirty="0"/>
           </a:p>
@@ -10918,7 +10918,7 @@
         </p:nvSpPr>
         <p:spPr>
           <a:xfrm>
-            <a:off x="1303020" y="2952076"/>
+            <a:off x="1303020" y="3184090"/>
             <a:ext cx="637580" cy="998220"/>
           </a:xfrm>
           <a:prstGeom prst="rect">
@@ -12753,7 +12753,7 @@
         </p:nvSpPr>
         <p:spPr>
           <a:xfrm>
-            <a:off x="1188720" y="2644204"/>
+            <a:off x="1188720" y="2821628"/>
             <a:ext cx="711994" cy="552450"/>
           </a:xfrm>
           <a:prstGeom prst="rect">
@@ -12907,6 +12907,13 @@
             </a:outerShdw>
           </a:effectLst>
         </p:spPr>
+        <p:txBody>
+          <a:bodyPr/>
+          <a:lstStyle/>
+          <a:p>
+            <a:endParaRPr lang="ko-KR" altLang="en-US" dirty="0"/>
+          </a:p>
+        </p:txBody>
       </p:sp>
       <p:sp>
         <p:nvSpPr>
@@ -12957,7 +12964,7 @@
         </p:nvSpPr>
         <p:spPr>
           <a:xfrm>
-            <a:off x="5355907" y="2644204"/>
+            <a:off x="5355907" y="2821628"/>
             <a:ext cx="711994" cy="552450"/>
           </a:xfrm>
           <a:prstGeom prst="rect">
@@ -13161,7 +13168,7 @@
         </p:nvSpPr>
         <p:spPr>
           <a:xfrm>
-            <a:off x="9523095" y="2644204"/>
+            <a:off x="9523095" y="2821627"/>
             <a:ext cx="711994" cy="552450"/>
           </a:xfrm>
           <a:prstGeom prst="rect">
@@ -13365,7 +13372,7 @@
         </p:nvSpPr>
         <p:spPr>
           <a:xfrm>
-            <a:off x="13690283" y="2644204"/>
+            <a:off x="13690283" y="2780684"/>
             <a:ext cx="394097" cy="552450"/>
           </a:xfrm>
           <a:prstGeom prst="rect">
@@ -13409,18 +13416,18 @@
         </p:nvSpPr>
         <p:spPr>
           <a:xfrm>
-            <a:off x="14065330" y="2804224"/>
-            <a:ext cx="828556" cy="396240"/>
-          </a:xfrm>
-          <a:prstGeom prst="rect">
-            <a:avLst/>
-          </a:prstGeom>
-          <a:noFill/>
-          <a:ln/>
-        </p:spPr>
-        <p:txBody>
-          <a:bodyPr wrap="square" lIns="25400" tIns="25400" rIns="25400" bIns="25400" rtlCol="0" anchor="t">
-            <a:normAutofit/>
+            <a:off x="14065330" y="2845168"/>
+            <a:ext cx="1029094" cy="321945"/>
+          </a:xfrm>
+          <a:prstGeom prst="rect">
+            <a:avLst/>
+          </a:prstGeom>
+          <a:noFill/>
+          <a:ln/>
+        </p:spPr>
+        <p:txBody>
+          <a:bodyPr wrap="square" lIns="25400" tIns="25400" rIns="25400" bIns="25400" rtlCol="0" anchor="t">
+            <a:normAutofit lnSpcReduction="10000"/>
           </a:bodyPr>
           <a:lstStyle/>
           <a:p>
@@ -15181,7 +15188,7 @@
         <p:spPr>
           <a:xfrm>
             <a:off x="1865471" y="2715708"/>
-            <a:ext cx="860465" cy="243840"/>
+            <a:ext cx="1059420" cy="224802"/>
           </a:xfrm>
           <a:prstGeom prst="rect">
             <a:avLst/>
@@ -15849,8 +15856,8 @@
         </p:nvSpPr>
         <p:spPr>
           <a:xfrm>
-            <a:off x="14395609" y="2715708"/>
-            <a:ext cx="796052" cy="243840"/>
+            <a:off x="14395608" y="2715707"/>
+            <a:ext cx="967501" cy="253365"/>
           </a:xfrm>
           <a:prstGeom prst="rect">
             <a:avLst/>
@@ -16333,7 +16340,7 @@
               <a:buNone/>
             </a:pPr>
             <a:r>
-              <a:rPr lang="en-US" sz="2550" b="1" dirty="0">
+              <a:rPr lang="en-US" sz="2550" b="1" dirty="0" err="1">
                 <a:solidFill>
                   <a:srgbClr val="12161D"/>
                 </a:solidFill>
@@ -16341,7 +16348,7 @@
                 <a:ea typeface="Arial" pitchFamily="34" charset="-122"/>
                 <a:cs typeface="Arial" pitchFamily="34" charset="-120"/>
               </a:rPr>
-              <a:t>현 황</a:t>
+              <a:t>현황</a:t>
             </a:r>
             <a:endParaRPr lang="en-US" sz="2550" dirty="0"/>
           </a:p>
@@ -18285,7 +18292,7 @@
         <p:spPr>
           <a:xfrm>
             <a:off x="1834991" y="8481124"/>
-            <a:ext cx="712827" cy="342900"/>
+            <a:ext cx="882968" cy="381000"/>
           </a:xfrm>
           <a:prstGeom prst="rect">
             <a:avLst/>
@@ -18979,7 +18986,7 @@
         <p:spPr>
           <a:xfrm>
             <a:off x="15039380" y="8481124"/>
-            <a:ext cx="461843" cy="342900"/>
+            <a:ext cx="587307" cy="342900"/>
           </a:xfrm>
           <a:prstGeom prst="rect">
             <a:avLst/>
@@ -19828,17 +19835,17 @@
         <p:spPr>
           <a:xfrm>
             <a:off x="15956638" y="9525000"/>
-            <a:ext cx="1264563" cy="259080"/>
-          </a:xfrm>
-          <a:prstGeom prst="rect">
-            <a:avLst/>
-          </a:prstGeom>
-          <a:noFill/>
-          <a:ln/>
-        </p:spPr>
-        <p:txBody>
-          <a:bodyPr wrap="square" lIns="25400" tIns="25400" rIns="25400" bIns="25400" rtlCol="0" anchor="t">
-            <a:normAutofit/>
+            <a:ext cx="1403314" cy="259080"/>
+          </a:xfrm>
+          <a:prstGeom prst="rect">
+            <a:avLst/>
+          </a:prstGeom>
+          <a:noFill/>
+          <a:ln/>
+        </p:spPr>
+        <p:txBody>
+          <a:bodyPr wrap="square" lIns="25400" tIns="25400" rIns="25400" bIns="25400" rtlCol="0" anchor="t">
+            <a:normAutofit lnSpcReduction="10000"/>
           </a:bodyPr>
           <a:lstStyle/>
           <a:p>
@@ -20025,7 +20032,7 @@
               <a:buNone/>
             </a:pPr>
             <a:r>
-              <a:rPr lang="en-US" sz="6450" b="1" kern="0" spc="129" dirty="0">
+              <a:rPr lang="en-US" sz="6450" b="1" kern="0" spc="129" dirty="0" err="1">
                 <a:solidFill>
                   <a:srgbClr val="F5F3EE"/>
                 </a:solidFill>
@@ -20033,7 +20040,7 @@
                 <a:ea typeface="Arial" pitchFamily="34" charset="-122"/>
                 <a:cs typeface="Arial" pitchFamily="34" charset="-120"/>
               </a:rPr>
-              <a:t>현 황</a:t>
+              <a:t>현황</a:t>
             </a:r>
             <a:endParaRPr lang="en-US" sz="6450" dirty="0"/>
           </a:p>
@@ -20078,13 +20085,24 @@
         </p:spPr>
         <p:txBody>
           <a:bodyPr wrap="square" lIns="25400" tIns="25400" rIns="25400" bIns="25400" rtlCol="0" anchor="t">
-            <a:normAutofit/>
-          </a:bodyPr>
-          <a:lstStyle/>
-          <a:p>
-            <a:pPr marL="0" indent="0" algn="l">
-              <a:buNone/>
-            </a:pPr>
+            <a:normAutofit fontScale="92500"/>
+          </a:bodyPr>
+          <a:lstStyle/>
+          <a:p>
+            <a:pPr marL="0" indent="0" algn="l">
+              <a:buNone/>
+            </a:pPr>
+            <a:r>
+              <a:rPr lang="en-US" sz="2025" dirty="0" err="1">
+                <a:solidFill>
+                  <a:srgbClr val="C9CCD1"/>
+                </a:solidFill>
+                <a:latin typeface="Arial" pitchFamily="34" charset="0"/>
+                <a:ea typeface="Arial" pitchFamily="34" charset="-122"/>
+                <a:cs typeface="Arial" pitchFamily="34" charset="-120"/>
+              </a:rPr>
+              <a:t>아침마다</a:t>
+            </a:r>
             <a:r>
               <a:rPr lang="en-US" sz="2025" dirty="0">
                 <a:solidFill>
@@ -20094,7 +20112,7 @@
                 <a:ea typeface="Arial" pitchFamily="34" charset="-122"/>
                 <a:cs typeface="Arial" pitchFamily="34" charset="-120"/>
               </a:rPr>
-              <a:t>아침마다 9개 사이트, 손으로 취합</a:t>
+              <a:t> 17개 사이트, 손으로 취합</a:t>
             </a:r>
             <a:endParaRPr lang="en-US" sz="2025" dirty="0"/>
           </a:p>
@@ -20398,6 +20416,17 @@
               <a:buNone/>
             </a:pPr>
             <a:r>
+              <a:rPr lang="en-US" sz="4050" b="1" kern="0" spc="-81" dirty="0" err="1">
+                <a:solidFill>
+                  <a:srgbClr val="12161D"/>
+                </a:solidFill>
+                <a:latin typeface="Arial" pitchFamily="34" charset="0"/>
+                <a:ea typeface="Arial" pitchFamily="34" charset="-122"/>
+                <a:cs typeface="Arial" pitchFamily="34" charset="-120"/>
+              </a:rPr>
+              <a:t>아침마다</a:t>
+            </a:r>
+            <a:r>
               <a:rPr lang="en-US" sz="4050" b="1" kern="0" spc="-81" dirty="0">
                 <a:solidFill>
                   <a:srgbClr val="12161D"/>
@@ -20406,7 +20435,7 @@
                 <a:ea typeface="Arial" pitchFamily="34" charset="-122"/>
                 <a:cs typeface="Arial" pitchFamily="34" charset="-120"/>
               </a:rPr>
-              <a:t>아침마다 9개 터미널 사이트, 손으로 취합하는 현실</a:t>
+              <a:t> 17개 터미널 사이트, 손으로 취합하는 현실</a:t>
             </a:r>
             <a:endParaRPr lang="en-US" sz="4050" dirty="0"/>
           </a:p>
@@ -20536,18 +20565,18 @@
         </p:nvSpPr>
         <p:spPr>
           <a:xfrm>
-            <a:off x="1226820" y="6281896"/>
-            <a:ext cx="537329" cy="782955"/>
-          </a:xfrm>
-          <a:prstGeom prst="rect">
-            <a:avLst/>
-          </a:prstGeom>
-          <a:noFill/>
-          <a:ln/>
-        </p:spPr>
-        <p:txBody>
-          <a:bodyPr wrap="square" lIns="25400" tIns="25400" rIns="25400" bIns="25400" rtlCol="0" anchor="t">
-            <a:normAutofit/>
+            <a:off x="1144340" y="6703970"/>
+            <a:ext cx="738458" cy="782955"/>
+          </a:xfrm>
+          <a:prstGeom prst="rect">
+            <a:avLst/>
+          </a:prstGeom>
+          <a:noFill/>
+          <a:ln/>
+        </p:spPr>
+        <p:txBody>
+          <a:bodyPr wrap="square" lIns="25400" tIns="25400" rIns="25400" bIns="25400" rtlCol="0" anchor="t">
+            <a:normAutofit fontScale="77500" lnSpcReduction="20000"/>
           </a:bodyPr>
           <a:lstStyle/>
           <a:p>
@@ -20558,17 +20587,9 @@
               <a:buNone/>
             </a:pPr>
             <a:r>
-              <a:rPr lang="en-US" sz="6900" b="1" kern="0" spc="-207" dirty="0">
-                <a:solidFill>
-                  <a:srgbClr val="12161D"/>
-                </a:solidFill>
-                <a:latin typeface="Arial" pitchFamily="34" charset="0"/>
-                <a:ea typeface="Arial" pitchFamily="34" charset="-122"/>
-                <a:cs typeface="Arial" pitchFamily="34" charset="-120"/>
-              </a:rPr>
-              <a:t>9</a:t>
-            </a:r>
-            <a:endParaRPr lang="en-US" sz="6900" dirty="0"/>
+              <a:rPr lang="en-US" sz="6900" b="1" dirty="0"/>
+              <a:t>17</a:t>
+            </a:r>
           </a:p>
         </p:txBody>
       </p:sp>
@@ -20580,8 +20601,8 @@
         </p:nvSpPr>
         <p:spPr>
           <a:xfrm>
-            <a:off x="1764149" y="6601936"/>
-            <a:ext cx="1327106" cy="480060"/>
+            <a:off x="1846853" y="6627687"/>
+            <a:ext cx="1973017" cy="480060"/>
           </a:xfrm>
           <a:prstGeom prst="rect">
             <a:avLst/>
@@ -21825,7 +21846,7 @@
         <p:spPr>
           <a:xfrm>
             <a:off x="1245870" y="2582506"/>
-            <a:ext cx="987623" cy="396240"/>
+            <a:ext cx="1285042" cy="396240"/>
           </a:xfrm>
           <a:prstGeom prst="rect">
             <a:avLst/>
@@ -22018,7 +22039,7 @@
         <p:spPr>
           <a:xfrm>
             <a:off x="6808470" y="2582506"/>
-            <a:ext cx="1328809" cy="396240"/>
+            <a:ext cx="1542694" cy="396240"/>
           </a:xfrm>
           <a:prstGeom prst="rect">
             <a:avLst/>
@@ -22210,8 +22231,8 @@
         </p:nvSpPr>
         <p:spPr>
           <a:xfrm>
-            <a:off x="12371070" y="2582506"/>
-            <a:ext cx="1056442" cy="396240"/>
+            <a:off x="12371069" y="2582506"/>
+            <a:ext cx="1258847" cy="396240"/>
           </a:xfrm>
           <a:prstGeom prst="rect">
             <a:avLst/>
@@ -22404,7 +22425,7 @@
         <p:spPr>
           <a:xfrm>
             <a:off x="1245870" y="6249988"/>
-            <a:ext cx="987623" cy="396240"/>
+            <a:ext cx="1169784" cy="396240"/>
           </a:xfrm>
           <a:prstGeom prst="rect">
             <a:avLst/>
@@ -22596,8 +22617,8 @@
         </p:nvSpPr>
         <p:spPr>
           <a:xfrm>
-            <a:off x="6808470" y="6249988"/>
-            <a:ext cx="1056442" cy="396240"/>
+            <a:off x="6808469" y="6249988"/>
+            <a:ext cx="1243709" cy="396240"/>
           </a:xfrm>
           <a:prstGeom prst="rect">
             <a:avLst/>
@@ -22790,7 +22811,7 @@
         <p:spPr>
           <a:xfrm>
             <a:off x="12371070" y="6249988"/>
-            <a:ext cx="1056442" cy="396240"/>
+            <a:ext cx="1258846" cy="396240"/>
           </a:xfrm>
           <a:prstGeom prst="rect">
             <a:avLst/>
@@ -23830,7 +23851,7 @@
         <p:spPr>
           <a:xfrm>
             <a:off x="12960073" y="6821868"/>
-            <a:ext cx="1060013" cy="502920"/>
+            <a:ext cx="1383724" cy="502920"/>
           </a:xfrm>
           <a:prstGeom prst="rect">
             <a:avLst/>
@@ -26716,7 +26737,7 @@
         <p:spPr>
           <a:xfrm>
             <a:off x="2185154" y="6914686"/>
-            <a:ext cx="944285" cy="457200"/>
+            <a:ext cx="1063347" cy="457200"/>
           </a:xfrm>
           <a:prstGeom prst="rect">
             <a:avLst/>
@@ -26961,7 +26982,7 @@
         <p:spPr>
           <a:xfrm>
             <a:off x="7451646" y="6670370"/>
-            <a:ext cx="601980" cy="457200"/>
+            <a:ext cx="871894" cy="457200"/>
           </a:xfrm>
           <a:prstGeom prst="rect">
             <a:avLst/>
@@ -27206,7 +27227,7 @@
         <p:spPr>
           <a:xfrm>
             <a:off x="10097572" y="6670370"/>
-            <a:ext cx="944285" cy="457200"/>
+            <a:ext cx="1283137" cy="457200"/>
           </a:xfrm>
           <a:prstGeom prst="rect">
             <a:avLst/>
